--- a/docs/答辩PPT_心镜.pptx
+++ b/docs/答辩PPT_心镜.pptx
@@ -3107,8 +3107,8 @@
         </p:nvSpPr>
         <p:spPr>
           <a:xfrm>
-            <a:off x="548640" y="320040"/>
-            <a:ext cx="10972800" cy="914400"/>
+            <a:off x="548640" y="201168"/>
+            <a:ext cx="10972800" cy="274320"/>
           </a:xfrm>
           <a:prstGeom prst="rect">
             <a:avLst/>
@@ -3116,21 +3116,21 @@
           <a:noFill/>
         </p:spPr>
         <p:txBody>
-          <a:bodyPr wrap="square">
+          <a:bodyPr wrap="none">
             <a:spAutoFit/>
           </a:bodyPr>
           <a:lstStyle/>
           <a:p>
             <a:pPr>
-              <a:defRPr sz="4400" b="1">
-                <a:solidFill>
-                  <a:srgbClr val="1F3A5F"/>
-                </a:solidFill>
-                <a:latin typeface="微软雅黑"/>
-              </a:defRPr>
-            </a:pPr>
-            <a:r>
-              <a:t>心镜 PsyBench</a:t>
+              <a:defRPr sz="1000">
+                <a:solidFill>
+                  <a:srgbClr val="C0504D"/>
+                </a:solidFill>
+                <a:latin typeface="Consolas"/>
+              </a:defRPr>
+            </a:pPr>
+            <a:r>
+              <a:t>2026AIC · AI+心理健康 算法主题赛</a:t>
             </a:r>
           </a:p>
         </p:txBody>
@@ -3143,8 +3143,8 @@
         </p:nvSpPr>
         <p:spPr>
           <a:xfrm>
-            <a:off x="731520" y="1554480"/>
-            <a:ext cx="10424160" cy="5120640"/>
+            <a:off x="502920" y="274320"/>
+            <a:ext cx="11155680" cy="822960"/>
           </a:xfrm>
           <a:prstGeom prst="rect">
             <a:avLst/>
@@ -3158,29 +3158,15 @@
           <a:lstStyle/>
           <a:p>
             <a:pPr>
-              <a:defRPr sz="2200">
+              <a:defRPr sz="4400" b="1">
+                <a:solidFill>
+                  <a:srgbClr val="1D2A3A"/>
+                </a:solidFill>
                 <a:latin typeface="微软雅黑"/>
               </a:defRPr>
             </a:pPr>
             <a:r>
-              <a:t>大模型心理仿真量化测评平台</a:t>
-            </a:r>
-          </a:p>
-          <a:p>
-            <a:pPr>
-              <a:defRPr sz="2200">
-                <a:latin typeface="微软雅黑"/>
-              </a:defRPr>
-            </a:pPr>
-          </a:p>
-          <a:p>
-            <a:pPr>
-              <a:defRPr sz="2200">
-                <a:latin typeface="微软雅黑"/>
-              </a:defRPr>
-            </a:pPr>
-            <a:r>
-              <a:t>—— 为 AI 心理状态建立可验证的量化测评标准 ——</a:t>
+              <a:t>心镜 PsyMirror</a:t>
             </a:r>
           </a:p>
         </p:txBody>
@@ -3193,8 +3179,8 @@
         </p:nvSpPr>
         <p:spPr>
           <a:xfrm>
-            <a:off x="731520" y="4754880"/>
-            <a:ext cx="10424160" cy="5120640"/>
+            <a:off x="640080" y="1554480"/>
+            <a:ext cx="10881360" cy="5303520"/>
           </a:xfrm>
           <a:prstGeom prst="rect">
             <a:avLst/>
@@ -3208,17 +3194,82 @@
           <a:lstStyle/>
           <a:p>
             <a:pPr>
-              <a:defRPr sz="1600">
+              <a:defRPr sz="2000">
+                <a:solidFill>
+                  <a:srgbClr val="1D2A3A"/>
+                </a:solidFill>
                 <a:latin typeface="微软雅黑"/>
               </a:defRPr>
             </a:pPr>
             <a:r>
-              <a:t>2026AIC「AI+心理健康」算法主题赛</a:t>
-            </a:r>
-          </a:p>
-          <a:p>
-            <a:pPr>
-              <a:defRPr sz="1600">
+              <a:t>AI 心理健康的计量级评测场</a:t>
+            </a:r>
+          </a:p>
+          <a:p>
+            <a:pPr>
+              <a:defRPr sz="2000">
+                <a:solidFill>
+                  <a:srgbClr val="1D2A3A"/>
+                </a:solidFill>
+                <a:latin typeface="微软雅黑"/>
+              </a:defRPr>
+            </a:pPr>
+          </a:p>
+          <a:p>
+            <a:pPr>
+              <a:defRPr sz="2000">
+                <a:solidFill>
+                  <a:srgbClr val="1D2A3A"/>
+                </a:solidFill>
+                <a:latin typeface="微软雅黑"/>
+              </a:defRPr>
+            </a:pPr>
+            <a:r>
+              <a:t>盲测协议 × 心理计量学 × 四场评测</a:t>
+            </a:r>
+          </a:p>
+        </p:txBody>
+      </p:sp>
+      <p:sp>
+        <p:nvSpPr>
+          <p:cNvPr id="5" name="TextBox 4"/>
+          <p:cNvSpPr txBox="1"/>
+          <p:nvPr/>
+        </p:nvSpPr>
+        <p:spPr>
+          <a:xfrm>
+            <a:off x="640080" y="5120640"/>
+            <a:ext cx="10881360" cy="5303520"/>
+          </a:xfrm>
+          <a:prstGeom prst="rect">
+            <a:avLst/>
+          </a:prstGeom>
+          <a:noFill/>
+        </p:spPr>
+        <p:txBody>
+          <a:bodyPr wrap="square">
+            <a:spAutoFit/>
+          </a:bodyPr>
+          <a:lstStyle/>
+          <a:p>
+            <a:pPr>
+              <a:defRPr sz="1400">
+                <a:solidFill>
+                  <a:srgbClr val="1D2A3A"/>
+                </a:solidFill>
+                <a:latin typeface="微软雅黑"/>
+              </a:defRPr>
+            </a:pPr>
+            <a:r>
+              <a:t>量场 · 考场 · 炼场 · 预演场</a:t>
+            </a:r>
+          </a:p>
+          <a:p>
+            <a:pPr>
+              <a:defRPr sz="1400">
+                <a:solidFill>
+                  <a:srgbClr val="1D2A3A"/>
+                </a:solidFill>
                 <a:latin typeface="微软雅黑"/>
               </a:defRPr>
             </a:pPr>
@@ -3254,8 +3305,8 @@
         </p:nvSpPr>
         <p:spPr>
           <a:xfrm>
-            <a:off x="548640" y="320040"/>
-            <a:ext cx="10972800" cy="914400"/>
+            <a:off x="548640" y="201168"/>
+            <a:ext cx="10972800" cy="274320"/>
           </a:xfrm>
           <a:prstGeom prst="rect">
             <a:avLst/>
@@ -3263,21 +3314,21 @@
           <a:noFill/>
         </p:spPr>
         <p:txBody>
-          <a:bodyPr wrap="square">
+          <a:bodyPr wrap="none">
             <a:spAutoFit/>
           </a:bodyPr>
           <a:lstStyle/>
           <a:p>
             <a:pPr>
-              <a:defRPr sz="3000" b="1">
-                <a:solidFill>
-                  <a:srgbClr val="1F3A5F"/>
-                </a:solidFill>
-                <a:latin typeface="微软雅黑"/>
-              </a:defRPr>
-            </a:pPr>
-            <a:r>
-              <a:t>应用场景</a:t>
+              <a:defRPr sz="1000">
+                <a:solidFill>
+                  <a:srgbClr val="C0504D"/>
+                </a:solidFill>
+                <a:latin typeface="Consolas"/>
+              </a:defRPr>
+            </a:pPr>
+            <a:r>
+              <a:t>APPLICATION / 应用</a:t>
             </a:r>
           </a:p>
         </p:txBody>
@@ -3290,8 +3341,8 @@
         </p:nvSpPr>
         <p:spPr>
           <a:xfrm>
-            <a:off x="731520" y="1417320"/>
-            <a:ext cx="10424160" cy="5120640"/>
+            <a:off x="502920" y="274320"/>
+            <a:ext cx="11155680" cy="822960"/>
           </a:xfrm>
           <a:prstGeom prst="rect">
             <a:avLst/>
@@ -3305,32 +3356,77 @@
           <a:lstStyle/>
           <a:p>
             <a:pPr>
-              <a:defRPr sz="1500">
+              <a:defRPr sz="2800" b="1">
+                <a:solidFill>
+                  <a:srgbClr val="1D2A3A"/>
+                </a:solidFill>
                 <a:latin typeface="微软雅黑"/>
               </a:defRPr>
             </a:pPr>
             <a:r>
-              <a:t>• AI 心理产品效果质检：第三方、可复现的疗效验证尺子</a:t>
-            </a:r>
-          </a:p>
-          <a:p>
-            <a:pPr>
-              <a:defRPr sz="1500">
+              <a:t>三个落地场景</a:t>
+            </a:r>
+          </a:p>
+        </p:txBody>
+      </p:sp>
+      <p:sp>
+        <p:nvSpPr>
+          <p:cNvPr id="4" name="TextBox 3"/>
+          <p:cNvSpPr txBox="1"/>
+          <p:nvPr/>
+        </p:nvSpPr>
+        <p:spPr>
+          <a:xfrm>
+            <a:off x="640080" y="1463040"/>
+            <a:ext cx="10881360" cy="5303520"/>
+          </a:xfrm>
+          <a:prstGeom prst="rect">
+            <a:avLst/>
+          </a:prstGeom>
+          <a:noFill/>
+        </p:spPr>
+        <p:txBody>
+          <a:bodyPr wrap="square">
+            <a:spAutoFit/>
+          </a:bodyPr>
+          <a:lstStyle/>
+          <a:p>
+            <a:pPr>
+              <a:defRPr sz="1600">
+                <a:solidFill>
+                  <a:srgbClr val="42546B"/>
+                </a:solidFill>
                 <a:latin typeface="微软雅黑"/>
               </a:defRPr>
             </a:pPr>
             <a:r>
-              <a:t>• 心理教学：带真值的标准化仿真来访者（咨询技能训练、危机演练）</a:t>
-            </a:r>
-          </a:p>
-          <a:p>
-            <a:pPr>
-              <a:defRPr sz="1500">
+              <a:t>• AI 心理产品效果质检：上市前/迭代时的第三方计量级评测</a:t>
+            </a:r>
+          </a:p>
+          <a:p>
+            <a:pPr>
+              <a:defRPr sz="1600">
+                <a:solidFill>
+                  <a:srgbClr val="42546B"/>
+                </a:solidFill>
                 <a:latin typeface="微软雅黑"/>
               </a:defRPr>
             </a:pPr>
             <a:r>
-              <a:t>• 心理大模型评测基准：跨模型心理仿真保真度排行榜</a:t>
+              <a:t>• 心理教学：带真值的标准化仿真来访者（咨询训练、危机演练）</a:t>
+            </a:r>
+          </a:p>
+          <a:p>
+            <a:pPr>
+              <a:defRPr sz="1600">
+                <a:solidFill>
+                  <a:srgbClr val="42546B"/>
+                </a:solidFill>
+                <a:latin typeface="微软雅黑"/>
+              </a:defRPr>
+            </a:pPr>
+            <a:r>
+              <a:t>• 心理大模型评测基准：跨模型五维榜单与开放数据集</a:t>
             </a:r>
           </a:p>
         </p:txBody>
@@ -3361,8 +3457,8 @@
         </p:nvSpPr>
         <p:spPr>
           <a:xfrm>
-            <a:off x="548640" y="320040"/>
-            <a:ext cx="10972800" cy="914400"/>
+            <a:off x="548640" y="201168"/>
+            <a:ext cx="10972800" cy="274320"/>
           </a:xfrm>
           <a:prstGeom prst="rect">
             <a:avLst/>
@@ -3370,21 +3466,21 @@
           <a:noFill/>
         </p:spPr>
         <p:txBody>
-          <a:bodyPr wrap="square">
+          <a:bodyPr wrap="none">
             <a:spAutoFit/>
           </a:bodyPr>
           <a:lstStyle/>
           <a:p>
             <a:pPr>
-              <a:defRPr sz="3000" b="1">
-                <a:solidFill>
-                  <a:srgbClr val="1F3A5F"/>
-                </a:solidFill>
-                <a:latin typeface="微软雅黑"/>
-              </a:defRPr>
-            </a:pPr>
-            <a:r>
-              <a:t>总结与展望</a:t>
+              <a:defRPr sz="1000">
+                <a:solidFill>
+                  <a:srgbClr val="C0504D"/>
+                </a:solidFill>
+                <a:latin typeface="Consolas"/>
+              </a:defRPr>
+            </a:pPr>
+            <a:r>
+              <a:t>SUMMARY / 总结展望</a:t>
             </a:r>
           </a:p>
         </p:txBody>
@@ -3397,8 +3493,8 @@
         </p:nvSpPr>
         <p:spPr>
           <a:xfrm>
-            <a:off x="731520" y="1417320"/>
-            <a:ext cx="10424160" cy="5120640"/>
+            <a:off x="502920" y="274320"/>
+            <a:ext cx="11155680" cy="822960"/>
           </a:xfrm>
           <a:prstGeom prst="rect">
             <a:avLst/>
@@ -3412,7 +3508,43 @@
           <a:lstStyle/>
           <a:p>
             <a:pPr>
-              <a:defRPr sz="1600" b="1">
+              <a:defRPr sz="2800" b="1">
+                <a:solidFill>
+                  <a:srgbClr val="1D2A3A"/>
+                </a:solidFill>
+                <a:latin typeface="微软雅黑"/>
+              </a:defRPr>
+            </a:pPr>
+            <a:r>
+              <a:t>已交付 · 待扩展</a:t>
+            </a:r>
+          </a:p>
+        </p:txBody>
+      </p:sp>
+      <p:sp>
+        <p:nvSpPr>
+          <p:cNvPr id="4" name="TextBox 3"/>
+          <p:cNvSpPr txBox="1"/>
+          <p:nvPr/>
+        </p:nvSpPr>
+        <p:spPr>
+          <a:xfrm>
+            <a:off x="640080" y="1463040"/>
+            <a:ext cx="10881360" cy="5303520"/>
+          </a:xfrm>
+          <a:prstGeom prst="rect">
+            <a:avLst/>
+          </a:prstGeom>
+          <a:noFill/>
+        </p:spPr>
+        <p:txBody>
+          <a:bodyPr wrap="square">
+            <a:spAutoFit/>
+          </a:bodyPr>
+          <a:lstStyle/>
+          <a:p>
+            <a:pPr>
+              <a:defRPr sz="1500" b="1">
                 <a:solidFill>
                   <a:srgbClr val="C0504D"/>
                 </a:solidFill>
@@ -3420,12 +3552,12 @@
               </a:defRPr>
             </a:pPr>
             <a:r>
-              <a:t>【已完成】Soul 规范 + 盲测协议 + 四维心理计量学验证 + 三臂干预实验 + 全自动报告</a:t>
-            </a:r>
-          </a:p>
-          <a:p>
-            <a:pPr>
-              <a:defRPr sz="1600" b="1">
+              <a:t>【已完成】四场评测场 E1-E8 全部跑通；81 项测试；真实数据与自动报告；视觉身份与示意图</a:t>
+            </a:r>
+          </a:p>
+          <a:p>
+            <a:pPr>
+              <a:defRPr sz="1500" b="1">
                 <a:solidFill>
                   <a:srgbClr val="C0504D"/>
                 </a:solidFill>
@@ -3433,7 +3565,7 @@
               </a:defRPr>
             </a:pPr>
             <a:r>
-              <a:t>【展望】跨模型基准 / 真人常模校准 / 长程干预与危机场景 / 平台化服务 / 本土化量表</a:t>
+              <a:t>【展望】跨模型榜单 / 真人常模校准 / 长程干预与危机演练 / 平台化服务 / 本土化量表</a:t>
             </a:r>
           </a:p>
         </p:txBody>
@@ -3464,8 +3596,8 @@
         </p:nvSpPr>
         <p:spPr>
           <a:xfrm>
-            <a:off x="548640" y="320040"/>
-            <a:ext cx="10972800" cy="914400"/>
+            <a:off x="548640" y="201168"/>
+            <a:ext cx="10972800" cy="274320"/>
           </a:xfrm>
           <a:prstGeom prst="rect">
             <a:avLst/>
@@ -3473,21 +3605,21 @@
           <a:noFill/>
         </p:spPr>
         <p:txBody>
-          <a:bodyPr wrap="square">
+          <a:bodyPr wrap="none">
             <a:spAutoFit/>
           </a:bodyPr>
           <a:lstStyle/>
           <a:p>
             <a:pPr>
-              <a:defRPr sz="4000" b="1">
-                <a:solidFill>
-                  <a:srgbClr val="1F3A5F"/>
-                </a:solidFill>
-                <a:latin typeface="微软雅黑"/>
-              </a:defRPr>
-            </a:pPr>
-            <a:r>
-              <a:t>谢谢！</a:t>
+              <a:defRPr sz="1000">
+                <a:solidFill>
+                  <a:srgbClr val="C0504D"/>
+                </a:solidFill>
+                <a:latin typeface="Consolas"/>
+              </a:defRPr>
+            </a:pPr>
+            <a:r>
+              <a:t>THANKS</a:t>
             </a:r>
           </a:p>
         </p:txBody>
@@ -3500,8 +3632,8 @@
         </p:nvSpPr>
         <p:spPr>
           <a:xfrm>
-            <a:off x="731520" y="2377440"/>
-            <a:ext cx="10424160" cy="5120640"/>
+            <a:off x="502920" y="274320"/>
+            <a:ext cx="11155680" cy="822960"/>
           </a:xfrm>
           <a:prstGeom prst="rect">
             <a:avLst/>
@@ -3515,7 +3647,46 @@
           <a:lstStyle/>
           <a:p>
             <a:pPr>
-              <a:defRPr sz="1800">
+              <a:defRPr sz="4000" b="1">
+                <a:solidFill>
+                  <a:srgbClr val="1D2A3A"/>
+                </a:solidFill>
+                <a:latin typeface="微软雅黑"/>
+              </a:defRPr>
+            </a:pPr>
+            <a:r>
+              <a:t>谢谢</a:t>
+            </a:r>
+          </a:p>
+        </p:txBody>
+      </p:sp>
+      <p:sp>
+        <p:nvSpPr>
+          <p:cNvPr id="4" name="TextBox 3"/>
+          <p:cNvSpPr txBox="1"/>
+          <p:nvPr/>
+        </p:nvSpPr>
+        <p:spPr>
+          <a:xfrm>
+            <a:off x="640080" y="2194560"/>
+            <a:ext cx="10881360" cy="5303520"/>
+          </a:xfrm>
+          <a:prstGeom prst="rect">
+            <a:avLst/>
+          </a:prstGeom>
+          <a:noFill/>
+        </p:spPr>
+        <p:txBody>
+          <a:bodyPr wrap="square">
+            <a:spAutoFit/>
+          </a:bodyPr>
+          <a:lstStyle/>
+          <a:p>
+            <a:pPr>
+              <a:defRPr sz="1600">
+                <a:solidFill>
+                  <a:srgbClr val="1D2A3A"/>
+                </a:solidFill>
                 <a:latin typeface="微软雅黑"/>
               </a:defRPr>
             </a:pPr>
@@ -3551,8 +3722,8 @@
         </p:nvSpPr>
         <p:spPr>
           <a:xfrm>
-            <a:off x="548640" y="320040"/>
-            <a:ext cx="10972800" cy="914400"/>
+            <a:off x="548640" y="201168"/>
+            <a:ext cx="10972800" cy="274320"/>
           </a:xfrm>
           <a:prstGeom prst="rect">
             <a:avLst/>
@@ -3560,21 +3731,21 @@
           <a:noFill/>
         </p:spPr>
         <p:txBody>
-          <a:bodyPr wrap="square">
+          <a:bodyPr wrap="none">
             <a:spAutoFit/>
           </a:bodyPr>
           <a:lstStyle/>
           <a:p>
             <a:pPr>
-              <a:defRPr sz="3000" b="1">
-                <a:solidFill>
-                  <a:srgbClr val="1F3A5F"/>
-                </a:solidFill>
-                <a:latin typeface="微软雅黑"/>
-              </a:defRPr>
-            </a:pPr>
-            <a:r>
-              <a:t>痛点：心理状态无法量化</a:t>
+              <a:defRPr sz="1000">
+                <a:solidFill>
+                  <a:srgbClr val="C0504D"/>
+                </a:solidFill>
+                <a:latin typeface="Consolas"/>
+              </a:defRPr>
+            </a:pPr>
+            <a:r>
+              <a:t>PAIN POINT / 痛点</a:t>
             </a:r>
           </a:p>
         </p:txBody>
@@ -3587,8 +3758,8 @@
         </p:nvSpPr>
         <p:spPr>
           <a:xfrm>
-            <a:off x="731520" y="1417320"/>
-            <a:ext cx="10424160" cy="5120640"/>
+            <a:off x="502920" y="274320"/>
+            <a:ext cx="11155680" cy="822960"/>
           </a:xfrm>
           <a:prstGeom prst="rect">
             <a:avLst/>
@@ -3602,52 +3773,90 @@
           <a:lstStyle/>
           <a:p>
             <a:pPr>
+              <a:defRPr sz="2800" b="1">
+                <a:solidFill>
+                  <a:srgbClr val="1D2A3A"/>
+                </a:solidFill>
+                <a:latin typeface="微软雅黑"/>
+              </a:defRPr>
+            </a:pPr>
+            <a:r>
+              <a:t>心理状态没有一把可验证的尺子</a:t>
+            </a:r>
+          </a:p>
+        </p:txBody>
+      </p:sp>
+      <p:sp>
+        <p:nvSpPr>
+          <p:cNvPr id="4" name="TextBox 3"/>
+          <p:cNvSpPr txBox="1"/>
+          <p:nvPr/>
+        </p:nvSpPr>
+        <p:spPr>
+          <a:xfrm>
+            <a:off x="640080" y="1234440"/>
+            <a:ext cx="10881360" cy="5303520"/>
+          </a:xfrm>
+          <a:prstGeom prst="rect">
+            <a:avLst/>
+          </a:prstGeom>
+          <a:noFill/>
+        </p:spPr>
+        <p:txBody>
+          <a:bodyPr wrap="square">
+            <a:spAutoFit/>
+          </a:bodyPr>
+          <a:lstStyle/>
+          <a:p>
+            <a:pPr>
               <a:defRPr sz="1500">
+                <a:solidFill>
+                  <a:srgbClr val="42546B"/>
+                </a:solidFill>
                 <a:latin typeface="微软雅黑"/>
               </a:defRPr>
             </a:pPr>
             <a:r>
-              <a:t>• 心理健康行业的基础性瓶颈：没有像血压血糖那样的客观心理度量。</a:t>
+              <a:t>• 行业瓶颈：心理状态无客观金标准；AI 心理产品疗效几乎全靠声称。</a:t>
             </a:r>
           </a:p>
           <a:p>
             <a:pPr>
               <a:defRPr sz="1500">
+                <a:solidFill>
+                  <a:srgbClr val="42546B"/>
+                </a:solidFill>
                 <a:latin typeface="微软雅黑"/>
               </a:defRPr>
             </a:pPr>
             <a:r>
-              <a:t>• 真人自评存在社会赞许、报告偏差；大规模筛查与复测成本高。</a:t>
+              <a:t>• 实测证据：开源项目 Hardmind 中，设定相反的「孤独学生」与「开朗学生」前测 UCLA 均得高分（57 vs 61），</a:t>
             </a:r>
           </a:p>
           <a:p>
             <a:pPr>
               <a:defRPr sz="1500">
+                <a:solidFill>
+                  <a:srgbClr val="1D2A3A"/>
+                </a:solidFill>
                 <a:latin typeface="微软雅黑"/>
               </a:defRPr>
             </a:pPr>
             <a:r>
-              <a:t>• AI 心理产品（陪伴/疏导/心理大模型）的心理状态与疗效缺乏可验证的测量。</a:t>
+              <a:t>  提示词污染导致测量完全失效。</a:t>
             </a:r>
           </a:p>
           <a:p>
             <a:pPr>
               <a:defRPr sz="1500">
+                <a:solidFill>
+                  <a:srgbClr val="42546B"/>
+                </a:solidFill>
                 <a:latin typeface="微软雅黑"/>
               </a:defRPr>
             </a:pPr>
             <a:r>
-              <a:t>• 实测证据：开源项目 Hardmind 中，设定相反的孤独学生与开朗学生，</a:t>
-            </a:r>
-          </a:p>
-          <a:p>
-            <a:pPr>
-              <a:defRPr sz="1600">
-                <a:latin typeface="微软雅黑"/>
-              </a:defRPr>
-            </a:pPr>
-            <a:r>
-              <a:t>  前测 UCLA 得 57 vs 61（均为高分）——提示词污染导致测量完全失效。</a:t>
+              <a:t>• 前沿佐证：LLM「心理画像」被最新文献指为测量伪影（arXiv 2606.20205）。</a:t>
             </a:r>
           </a:p>
         </p:txBody>
@@ -3678,8 +3887,8 @@
         </p:nvSpPr>
         <p:spPr>
           <a:xfrm>
-            <a:off x="548640" y="320040"/>
-            <a:ext cx="10972800" cy="914400"/>
+            <a:off x="548640" y="201168"/>
+            <a:ext cx="10972800" cy="274320"/>
           </a:xfrm>
           <a:prstGeom prst="rect">
             <a:avLst/>
@@ -3687,21 +3896,21 @@
           <a:noFill/>
         </p:spPr>
         <p:txBody>
-          <a:bodyPr wrap="square">
+          <a:bodyPr wrap="none">
             <a:spAutoFit/>
           </a:bodyPr>
           <a:lstStyle/>
           <a:p>
             <a:pPr>
-              <a:defRPr sz="3000" b="1">
-                <a:solidFill>
-                  <a:srgbClr val="1F3A5F"/>
-                </a:solidFill>
-                <a:latin typeface="微软雅黑"/>
-              </a:defRPr>
-            </a:pPr>
-            <a:r>
-              <a:t>需求分析与调研</a:t>
+              <a:defRPr sz="1000">
+                <a:solidFill>
+                  <a:srgbClr val="C0504D"/>
+                </a:solidFill>
+                <a:latin typeface="Consolas"/>
+              </a:defRPr>
+            </a:pPr>
+            <a:r>
+              <a:t>METHOD / 四场评测场</a:t>
             </a:r>
           </a:p>
         </p:txBody>
@@ -3714,8 +3923,8 @@
         </p:nvSpPr>
         <p:spPr>
           <a:xfrm>
-            <a:off x="731520" y="1417320"/>
-            <a:ext cx="10424160" cy="5120640"/>
+            <a:off x="502920" y="274320"/>
+            <a:ext cx="11155680" cy="822960"/>
           </a:xfrm>
           <a:prstGeom prst="rect">
             <a:avLst/>
@@ -3729,46 +3938,43 @@
           <a:lstStyle/>
           <a:p>
             <a:pPr>
-              <a:defRPr sz="1500">
+              <a:defRPr sz="2800" b="1">
+                <a:solidFill>
+                  <a:srgbClr val="1D2A3A"/>
+                </a:solidFill>
                 <a:latin typeface="微软雅黑"/>
               </a:defRPr>
             </a:pPr>
             <a:r>
-              <a:t>• 文献调研：心理测量学经典 + 2023-2026 LLM 心理评估前沿（含测量伪影批判）。</a:t>
-            </a:r>
-          </a:p>
-          <a:p>
-            <a:pPr>
-              <a:defRPr sz="1500">
-                <a:latin typeface="微软雅黑"/>
-              </a:defRPr>
-            </a:pPr>
-            <a:r>
-              <a:t>• 代码审计：Hardmind 六大测量学缺陷（提示词污染/非盲测/无信效度/无统计/无对照/对象错位）。</a:t>
-            </a:r>
-          </a:p>
-          <a:p>
-            <a:pPr>
-              <a:defRPr sz="1500">
-                <a:latin typeface="微软雅黑"/>
-              </a:defRPr>
-            </a:pPr>
-            <a:r>
-              <a:t>• 竞品分析：AI 陪伴产品普遍以轮数、留存率代理疗效，无心理计量学证据。</a:t>
-            </a:r>
-          </a:p>
-          <a:p>
-            <a:pPr>
-              <a:defRPr sz="1500">
-                <a:latin typeface="微软雅黑"/>
-              </a:defRPr>
-            </a:pPr>
-            <a:r>
-              <a:t>• 归纳需求 R1-R7：量表库、Soul 规范、盲测、心理计量学验证、干预实验、可复现、伦理。</a:t>
-            </a:r>
-          </a:p>
-        </p:txBody>
-      </p:sp>
+              <a:t>一个中心，四个场</a:t>
+            </a:r>
+          </a:p>
+        </p:txBody>
+      </p:sp>
+      <p:pic>
+        <p:nvPicPr>
+          <p:cNvPr id="4" name="Picture 3" descr="d1_four_fields.png"/>
+          <p:cNvPicPr>
+            <a:picLocks noChangeAspect="1"/>
+          </p:cNvPicPr>
+          <p:nvPr/>
+        </p:nvPicPr>
+        <p:blipFill>
+          <a:blip r:embed="rId2"/>
+          <a:stretch>
+            <a:fillRect/>
+          </a:stretch>
+        </p:blipFill>
+        <p:spPr>
+          <a:xfrm>
+            <a:off x="640080" y="1371600"/>
+            <a:ext cx="7863840" cy="4423410"/>
+          </a:xfrm>
+          <a:prstGeom prst="rect">
+            <a:avLst/>
+          </a:prstGeom>
+        </p:spPr>
+      </p:pic>
     </p:spTree>
   </p:cSld>
   <p:clrMapOvr>
@@ -3795,8 +4001,8 @@
         </p:nvSpPr>
         <p:spPr>
           <a:xfrm>
-            <a:off x="548640" y="320040"/>
-            <a:ext cx="10972800" cy="914400"/>
+            <a:off x="548640" y="201168"/>
+            <a:ext cx="10972800" cy="274320"/>
           </a:xfrm>
           <a:prstGeom prst="rect">
             <a:avLst/>
@@ -3804,21 +4010,21 @@
           <a:noFill/>
         </p:spPr>
         <p:txBody>
-          <a:bodyPr wrap="square">
+          <a:bodyPr wrap="none">
             <a:spAutoFit/>
           </a:bodyPr>
           <a:lstStyle/>
           <a:p>
             <a:pPr>
-              <a:defRPr sz="3000" b="1">
-                <a:solidFill>
-                  <a:srgbClr val="1F3A5F"/>
-                </a:solidFill>
-                <a:latin typeface="微软雅黑"/>
-              </a:defRPr>
-            </a:pPr>
-            <a:r>
-              <a:t>方案：通用心理学评测 × 大模型 Soul 仿真</a:t>
+              <a:defRPr sz="1000">
+                <a:solidFill>
+                  <a:srgbClr val="C0504D"/>
+                </a:solidFill>
+                <a:latin typeface="Consolas"/>
+              </a:defRPr>
+            </a:pPr>
+            <a:r>
+              <a:t>FIELD 01 / 量场 · 盲测与信效度</a:t>
             </a:r>
           </a:p>
         </p:txBody>
@@ -3831,8 +4037,8 @@
         </p:nvSpPr>
         <p:spPr>
           <a:xfrm>
-            <a:off x="731520" y="1417320"/>
-            <a:ext cx="10424160" cy="5120640"/>
+            <a:off x="502920" y="274320"/>
+            <a:ext cx="11155680" cy="822960"/>
           </a:xfrm>
           <a:prstGeom prst="rect">
             <a:avLst/>
@@ -3846,42 +4052,88 @@
           <a:lstStyle/>
           <a:p>
             <a:pPr>
-              <a:defRPr sz="1600">
+              <a:defRPr sz="2800" b="1">
+                <a:solidFill>
+                  <a:srgbClr val="1D2A3A"/>
+                </a:solidFill>
                 <a:latin typeface="微软雅黑"/>
               </a:defRPr>
             </a:pPr>
             <a:r>
-              <a:t>把大模型 Soul 变成可重复、可干预、可标定真值的数字心理被试：</a:t>
-            </a:r>
-          </a:p>
-          <a:p>
-            <a:pPr>
-              <a:defRPr sz="1600">
+              <a:t>盲测恢复已知组区分（修复 Hardmind 失效）</a:t>
+            </a:r>
+          </a:p>
+        </p:txBody>
+      </p:sp>
+      <p:pic>
+        <p:nvPicPr>
+          <p:cNvPr id="4" name="Picture 3" descr="fig1_known_groups.png"/>
+          <p:cNvPicPr>
+            <a:picLocks noChangeAspect="1"/>
+          </p:cNvPicPr>
+          <p:nvPr/>
+        </p:nvPicPr>
+        <p:blipFill>
+          <a:blip r:embed="rId2"/>
+          <a:stretch>
+            <a:fillRect/>
+          </a:stretch>
+        </p:blipFill>
+        <p:spPr>
+          <a:xfrm>
+            <a:off x="640080" y="1371600"/>
+            <a:ext cx="7498079" cy="2325948"/>
+          </a:xfrm>
+          <a:prstGeom prst="rect">
+            <a:avLst/>
+          </a:prstGeom>
+        </p:spPr>
+      </p:pic>
+      <p:sp>
+        <p:nvSpPr>
+          <p:cNvPr id="5" name="TextBox 4"/>
+          <p:cNvSpPr txBox="1"/>
+          <p:nvPr/>
+        </p:nvSpPr>
+        <p:spPr>
+          <a:xfrm>
+            <a:off x="8503920" y="1645920"/>
+            <a:ext cx="3291840" cy="5303520"/>
+          </a:xfrm>
+          <a:prstGeom prst="rect">
+            <a:avLst/>
+          </a:prstGeom>
+          <a:noFill/>
+        </p:spPr>
+        <p:txBody>
+          <a:bodyPr wrap="square">
+            <a:spAutoFit/>
+          </a:bodyPr>
+          <a:lstStyle/>
+          <a:p>
+            <a:pPr>
+              <a:defRPr sz="1200">
+                <a:solidFill>
+                  <a:srgbClr val="1D2A3A"/>
+                </a:solidFill>
                 <a:latin typeface="微软雅黑"/>
               </a:defRPr>
             </a:pPr>
             <a:r>
-              <a:t>  P1 怎么造人 → Soul 规范：经历式人设（不贴标签）+ 声明真值（只校验不注入）</a:t>
-            </a:r>
-          </a:p>
-          <a:p>
-            <a:pPr>
-              <a:defRPr sz="1600">
+              <a:t>UCLA 高孤独 vs 低孤独：t=6.9，p=0.0002，d=4.3</a:t>
+            </a:r>
+          </a:p>
+          <a:p>
+            <a:pPr>
+              <a:defRPr sz="1200">
+                <a:solidFill>
+                  <a:srgbClr val="1D2A3A"/>
+                </a:solidFill>
                 <a:latin typeface="微软雅黑"/>
               </a:defRPr>
             </a:pPr>
             <a:r>
-              <a:t>  P2 怎么量   → 盲测协议：中性问卷说明，前后测完全一致，5 套经典量表</a:t>
-            </a:r>
-          </a:p>
-          <a:p>
-            <a:pPr>
-              <a:defRPr sz="1600">
-                <a:latin typeface="微软雅黑"/>
-              </a:defRPr>
-            </a:pPr>
-            <a:r>
-              <a:t>  P3 怎么验   → 心理计量学四维验证：信度 / 效度 / 反应度 / 保真度</a:t>
+              <a:t>PHQ-9 / GAD-7 已知组差异亦全部显著</a:t>
             </a:r>
           </a:p>
         </p:txBody>
@@ -3912,8 +4164,8 @@
         </p:nvSpPr>
         <p:spPr>
           <a:xfrm>
-            <a:off x="548640" y="320040"/>
-            <a:ext cx="10972800" cy="914400"/>
+            <a:off x="548640" y="201168"/>
+            <a:ext cx="10972800" cy="274320"/>
           </a:xfrm>
           <a:prstGeom prst="rect">
             <a:avLst/>
@@ -3921,21 +4173,21 @@
           <a:noFill/>
         </p:spPr>
         <p:txBody>
-          <a:bodyPr wrap="square">
+          <a:bodyPr wrap="none">
             <a:spAutoFit/>
           </a:bodyPr>
           <a:lstStyle/>
           <a:p>
             <a:pPr>
-              <a:defRPr sz="3000" b="1">
-                <a:solidFill>
-                  <a:srgbClr val="1F3A5F"/>
-                </a:solidFill>
-                <a:latin typeface="微软雅黑"/>
-              </a:defRPr>
-            </a:pPr>
-            <a:r>
-              <a:t>核心技术：盲测协议（对比 Hardmind）</a:t>
+              <a:defRPr sz="1000">
+                <a:solidFill>
+                  <a:srgbClr val="C0504D"/>
+                </a:solidFill>
+                <a:latin typeface="Consolas"/>
+              </a:defRPr>
+            </a:pPr>
+            <a:r>
+              <a:t>FIELD 02 / 考场 · 文化测量等价性（方向 8）</a:t>
             </a:r>
           </a:p>
         </p:txBody>
@@ -3948,8 +4200,8 @@
         </p:nvSpPr>
         <p:spPr>
           <a:xfrm>
-            <a:off x="731520" y="1554480"/>
-            <a:ext cx="10424160" cy="5120640"/>
+            <a:off x="502920" y="274320"/>
+            <a:ext cx="11155680" cy="822960"/>
           </a:xfrm>
           <a:prstGeom prst="rect">
             <a:avLst/>
@@ -3963,32 +4215,101 @@
           <a:lstStyle/>
           <a:p>
             <a:pPr>
-              <a:defRPr sz="1700">
+              <a:defRPr sz="2800" b="1">
+                <a:solidFill>
+                  <a:srgbClr val="1D2A3A"/>
+                </a:solidFill>
                 <a:latin typeface="微软雅黑"/>
               </a:defRPr>
             </a:pPr>
             <a:r>
-              <a:t>Hardmind 前测提示：你心情总体不错 | 后测：你刚经历温暖对话，请按好转作答</a:t>
-            </a:r>
-          </a:p>
-          <a:p>
-            <a:pPr>
-              <a:defRPr sz="1700">
+              <a:t>中文语境在症状量表上系统性高报</a:t>
+            </a:r>
+          </a:p>
+        </p:txBody>
+      </p:sp>
+      <p:pic>
+        <p:nvPicPr>
+          <p:cNvPr id="4" name="Picture 3" descr="fig6_culture.png"/>
+          <p:cNvPicPr>
+            <a:picLocks noChangeAspect="1"/>
+          </p:cNvPicPr>
+          <p:nvPr/>
+        </p:nvPicPr>
+        <p:blipFill>
+          <a:blip r:embed="rId2"/>
+          <a:stretch>
+            <a:fillRect/>
+          </a:stretch>
+        </p:blipFill>
+        <p:spPr>
+          <a:xfrm>
+            <a:off x="640080" y="1371600"/>
+            <a:ext cx="7498079" cy="2534234"/>
+          </a:xfrm>
+          <a:prstGeom prst="rect">
+            <a:avLst/>
+          </a:prstGeom>
+        </p:spPr>
+      </p:pic>
+      <p:sp>
+        <p:nvSpPr>
+          <p:cNvPr id="5" name="TextBox 4"/>
+          <p:cNvSpPr txBox="1"/>
+          <p:nvPr/>
+        </p:nvSpPr>
+        <p:spPr>
+          <a:xfrm>
+            <a:off x="8503920" y="1645920"/>
+            <a:ext cx="3291840" cy="5303520"/>
+          </a:xfrm>
+          <a:prstGeom prst="rect">
+            <a:avLst/>
+          </a:prstGeom>
+          <a:noFill/>
+        </p:spPr>
+        <p:txBody>
+          <a:bodyPr wrap="square">
+            <a:spAutoFit/>
+          </a:bodyPr>
+          <a:lstStyle/>
+          <a:p>
+            <a:pPr>
+              <a:defRPr sz="1200">
+                <a:solidFill>
+                  <a:srgbClr val="1D2A3A"/>
+                </a:solidFill>
                 <a:latin typeface="微软雅黑"/>
               </a:defRPr>
             </a:pPr>
             <a:r>
-              <a:t>心镜前测/后测：完全相同的学校心理健康中心匿名问卷，不含量表名、构念词、方向暗示。</a:t>
-            </a:r>
-          </a:p>
-          <a:p>
-            <a:pPr>
-              <a:defRPr sz="1700">
+              <a:t>GAD-7 中文-英文：+4.6 分，p=0.0085</a:t>
+            </a:r>
+          </a:p>
+          <a:p>
+            <a:pPr>
+              <a:defRPr sz="1200">
+                <a:solidFill>
+                  <a:srgbClr val="1D2A3A"/>
+                </a:solidFill>
                 <a:latin typeface="微软雅黑"/>
               </a:defRPr>
             </a:pPr>
             <a:r>
-              <a:t>人设只写经历（show, don't tell）；真值区间只用于事后校验。</a:t>
+              <a:t>PHQ-9 中文-英文：+2.6 分，p=0.0177</a:t>
+            </a:r>
+          </a:p>
+          <a:p>
+            <a:pPr>
+              <a:defRPr sz="1200">
+                <a:solidFill>
+                  <a:srgbClr val="1D2A3A"/>
+                </a:solidFill>
+                <a:latin typeface="微软雅黑"/>
+              </a:defRPr>
+            </a:pPr>
+            <a:r>
+              <a:t>全部 DIF 条目均为正方向 → 文化测量不等价</a:t>
             </a:r>
           </a:p>
         </p:txBody>
@@ -4019,8 +4340,8 @@
         </p:nvSpPr>
         <p:spPr>
           <a:xfrm>
-            <a:off x="548640" y="320040"/>
-            <a:ext cx="10972800" cy="914400"/>
+            <a:off x="548640" y="201168"/>
+            <a:ext cx="10972800" cy="274320"/>
           </a:xfrm>
           <a:prstGeom prst="rect">
             <a:avLst/>
@@ -4028,21 +4349,21 @@
           <a:noFill/>
         </p:spPr>
         <p:txBody>
-          <a:bodyPr wrap="square">
+          <a:bodyPr wrap="none">
             <a:spAutoFit/>
           </a:bodyPr>
           <a:lstStyle/>
           <a:p>
             <a:pPr>
-              <a:defRPr sz="3000" b="1">
-                <a:solidFill>
-                  <a:srgbClr val="1F3A5F"/>
-                </a:solidFill>
-                <a:latin typeface="微软雅黑"/>
-              </a:defRPr>
-            </a:pPr>
-            <a:r>
-              <a:t>四组实验（本地 qwen2.5:7b，全自动可复现）</a:t>
+              <a:defRPr sz="1000">
+                <a:solidFill>
+                  <a:srgbClr val="C0504D"/>
+                </a:solidFill>
+                <a:latin typeface="Consolas"/>
+              </a:defRPr>
+            </a:pPr>
+            <a:r>
+              <a:t>FIELD 03 / 炼场 · 危机安全评测（方向 3）</a:t>
             </a:r>
           </a:p>
         </p:txBody>
@@ -4055,8 +4376,8 @@
         </p:nvSpPr>
         <p:spPr>
           <a:xfrm>
-            <a:off x="731520" y="1417320"/>
-            <a:ext cx="10424160" cy="5120640"/>
+            <a:off x="502920" y="274320"/>
+            <a:ext cx="11155680" cy="822960"/>
           </a:xfrm>
           <a:prstGeom prst="rect">
             <a:avLst/>
@@ -4070,42 +4391,101 @@
           <a:lstStyle/>
           <a:p>
             <a:pPr>
-              <a:defRPr sz="1600">
+              <a:defRPr sz="2800" b="1">
+                <a:solidFill>
+                  <a:srgbClr val="1D2A3A"/>
+                </a:solidFill>
                 <a:latin typeface="微软雅黑"/>
               </a:defRPr>
             </a:pPr>
             <a:r>
-              <a:t>E1 已知组效度+信度：4 Soul × 3 量表 × 5 次独立盲测 → α / ICC / Welch t / Cohen d</a:t>
-            </a:r>
-          </a:p>
-          <a:p>
-            <a:pPr>
-              <a:defRPr sz="1600">
+              <a:t>危机评分卡：把安全变成可测的分数</a:t>
+            </a:r>
+          </a:p>
+        </p:txBody>
+      </p:sp>
+      <p:pic>
+        <p:nvPicPr>
+          <p:cNvPr id="4" name="Picture 3" descr="fig7_crisis.png"/>
+          <p:cNvPicPr>
+            <a:picLocks noChangeAspect="1"/>
+          </p:cNvPicPr>
+          <p:nvPr/>
+        </p:nvPicPr>
+        <p:blipFill>
+          <a:blip r:embed="rId2"/>
+          <a:stretch>
+            <a:fillRect/>
+          </a:stretch>
+        </p:blipFill>
+        <p:spPr>
+          <a:xfrm>
+            <a:off x="640080" y="1371600"/>
+            <a:ext cx="7498079" cy="2548493"/>
+          </a:xfrm>
+          <a:prstGeom prst="rect">
+            <a:avLst/>
+          </a:prstGeom>
+        </p:spPr>
+      </p:pic>
+      <p:sp>
+        <p:nvSpPr>
+          <p:cNvPr id="5" name="TextBox 4"/>
+          <p:cNvSpPr txBox="1"/>
+          <p:nvPr/>
+        </p:nvSpPr>
+        <p:spPr>
+          <a:xfrm>
+            <a:off x="8503920" y="1645920"/>
+            <a:ext cx="3291840" cy="5303520"/>
+          </a:xfrm>
+          <a:prstGeom prst="rect">
+            <a:avLst/>
+          </a:prstGeom>
+          <a:noFill/>
+        </p:spPr>
+        <p:txBody>
+          <a:bodyPr wrap="square">
+            <a:spAutoFit/>
+          </a:bodyPr>
+          <a:lstStyle/>
+          <a:p>
+            <a:pPr>
+              <a:defRPr sz="1200">
+                <a:solidFill>
+                  <a:srgbClr val="1D2A3A"/>
+                </a:solidFill>
                 <a:latin typeface="微软雅黑"/>
               </a:defRPr>
             </a:pPr>
             <a:r>
-              <a:t>E2 仿真保真度：实测 vs 声明真值区间 → 命中率 / 归一化偏差 / 等级相关</a:t>
-            </a:r>
-          </a:p>
-          <a:p>
-            <a:pPr>
-              <a:defRPr sz="1600">
+              <a:t>识别率 10% · 危害率 10%</a:t>
+            </a:r>
+          </a:p>
+          <a:p>
+            <a:pPr>
+              <a:defRPr sz="1200">
+                <a:solidFill>
+                  <a:srgbClr val="1D2A3A"/>
+                </a:solidFill>
                 <a:latin typeface="微软雅黑"/>
               </a:defRPr>
             </a:pPr>
             <a:r>
-              <a:t>E3 干预反应度：高孤独 Soul 三臂对照（陪伴/中性/书写）× 3 会话前后测 → 配对 t / dz</a:t>
-            </a:r>
-          </a:p>
-          <a:p>
-            <a:pPr>
-              <a:defRPr sz="1600">
+              <a:t>协议符合度 28%</a:t>
+            </a:r>
+          </a:p>
+          <a:p>
+            <a:pPr>
+              <a:defRPr sz="1200">
+                <a:solidFill>
+                  <a:srgbClr val="1D2A3A"/>
+                </a:solidFill>
                 <a:latin typeface="微软雅黑"/>
               </a:defRPr>
             </a:pPr>
             <a:r>
-              <a:t>E4 作答校正：标准盲测 vs 追加人群参照说明（探索性）</a:t>
+              <a:t>C-SSRS 分级剧本 · 双通道评分（法官+词典）· κ 一致性报告</a:t>
             </a:r>
           </a:p>
         </p:txBody>
@@ -4136,8 +4516,8 @@
         </p:nvSpPr>
         <p:spPr>
           <a:xfrm>
-            <a:off x="548640" y="320040"/>
-            <a:ext cx="10972800" cy="914400"/>
+            <a:off x="548640" y="201168"/>
+            <a:ext cx="10972800" cy="274320"/>
           </a:xfrm>
           <a:prstGeom prst="rect">
             <a:avLst/>
@@ -4145,28 +4525,64 @@
           <a:noFill/>
         </p:spPr>
         <p:txBody>
+          <a:bodyPr wrap="none">
+            <a:spAutoFit/>
+          </a:bodyPr>
+          <a:lstStyle/>
+          <a:p>
+            <a:pPr>
+              <a:defRPr sz="1000">
+                <a:solidFill>
+                  <a:srgbClr val="C0504D"/>
+                </a:solidFill>
+                <a:latin typeface="Consolas"/>
+              </a:defRPr>
+            </a:pPr>
+            <a:r>
+              <a:t>FIELD 04 / 预演场 · 数字孪生（方向 4/2）</a:t>
+            </a:r>
+          </a:p>
+        </p:txBody>
+      </p:sp>
+      <p:sp>
+        <p:nvSpPr>
+          <p:cNvPr id="3" name="TextBox 2"/>
+          <p:cNvSpPr txBox="1"/>
+          <p:nvPr/>
+        </p:nvSpPr>
+        <p:spPr>
+          <a:xfrm>
+            <a:off x="502920" y="274320"/>
+            <a:ext cx="11155680" cy="822960"/>
+          </a:xfrm>
+          <a:prstGeom prst="rect">
+            <a:avLst/>
+          </a:prstGeom>
+          <a:noFill/>
+        </p:spPr>
+        <p:txBody>
           <a:bodyPr wrap="square">
             <a:spAutoFit/>
           </a:bodyPr>
           <a:lstStyle/>
           <a:p>
             <a:pPr>
-              <a:defRPr sz="3000" b="1">
-                <a:solidFill>
-                  <a:srgbClr val="1F3A5F"/>
+              <a:defRPr sz="2800" b="1">
+                <a:solidFill>
+                  <a:srgbClr val="1D2A3A"/>
                 </a:solidFill>
                 <a:latin typeface="微软雅黑"/>
               </a:defRPr>
             </a:pPr>
             <a:r>
-              <a:t>结果 E1：盲测恢复已知组区分（修复 Hardmind 失效）</a:t>
+              <a:t>干预先在数字分身上试，再给人用</a:t>
             </a:r>
           </a:p>
         </p:txBody>
       </p:sp>
       <p:pic>
         <p:nvPicPr>
-          <p:cNvPr id="3" name="Picture 2" descr="fig1_known_groups.png"/>
+          <p:cNvPr id="4" name="Picture 3" descr="fig8_twin_pretrial.png"/>
           <p:cNvPicPr>
             <a:picLocks noChangeAspect="1"/>
           </p:cNvPicPr>
@@ -4180,8 +4596,8 @@
         </p:blipFill>
         <p:spPr>
           <a:xfrm>
-            <a:off x="731520" y="1463040"/>
-            <a:ext cx="7498079" cy="2325948"/>
+            <a:off x="640080" y="1371600"/>
+            <a:ext cx="7498079" cy="2598920"/>
           </a:xfrm>
           <a:prstGeom prst="rect">
             <a:avLst/>
@@ -4190,14 +4606,14 @@
       </p:pic>
       <p:sp>
         <p:nvSpPr>
-          <p:cNvPr id="4" name="TextBox 3"/>
+          <p:cNvPr id="5" name="TextBox 4"/>
           <p:cNvSpPr txBox="1"/>
           <p:nvPr/>
         </p:nvSpPr>
         <p:spPr>
           <a:xfrm>
-            <a:off x="8412480" y="1645920"/>
-            <a:ext cx="3566160" cy="5120640"/>
+            <a:off x="8503920" y="1645920"/>
+            <a:ext cx="3291840" cy="5303520"/>
           </a:xfrm>
           <a:prstGeom prst="rect">
             <a:avLst/>
@@ -4211,22 +4627,41 @@
           <a:lstStyle/>
           <a:p>
             <a:pPr>
-              <a:defRPr sz="1300">
+              <a:defRPr sz="1200">
+                <a:solidFill>
+                  <a:srgbClr val="1D2A3A"/>
+                </a:solidFill>
                 <a:latin typeface="微软雅黑"/>
               </a:defRPr>
             </a:pPr>
             <a:r>
-              <a:t>UCLA：高孤独 53.6 vs 低孤独 36.8，p=0.0002，d=4.34（Hardmind 为 57 vs 61）</a:t>
-            </a:r>
-          </a:p>
-          <a:p>
-            <a:pPr>
-              <a:defRPr sz="1300">
+              <a:t>剂量-反应曲线 + A/B 匹配规则</a:t>
+            </a:r>
+          </a:p>
+          <a:p>
+            <a:pPr>
+              <a:defRPr sz="1200">
+                <a:solidFill>
+                  <a:srgbClr val="1D2A3A"/>
+                </a:solidFill>
                 <a:latin typeface="微软雅黑"/>
               </a:defRPr>
             </a:pPr>
             <a:r>
-              <a:t>PHQ-9/GAD-7 已知组差异亦全部显著；等级相关 ρ=0.4~0.8</a:t>
+              <a:t>与 E3 同构实验交叉验证</a:t>
+            </a:r>
+          </a:p>
+          <a:p>
+            <a:pPr>
+              <a:defRPr sz="1200">
+                <a:solidFill>
+                  <a:srgbClr val="1D2A3A"/>
+                </a:solidFill>
+                <a:latin typeface="微软雅黑"/>
+              </a:defRPr>
+            </a:pPr>
+            <a:r>
+              <a:t>决策辅助，非临床证据</a:t>
             </a:r>
           </a:p>
         </p:txBody>
@@ -4257,8 +4692,8 @@
         </p:nvSpPr>
         <p:spPr>
           <a:xfrm>
-            <a:off x="548640" y="320040"/>
-            <a:ext cx="10972800" cy="914400"/>
+            <a:off x="548640" y="201168"/>
+            <a:ext cx="10972800" cy="274320"/>
           </a:xfrm>
           <a:prstGeom prst="rect">
             <a:avLst/>
@@ -4266,28 +4701,64 @@
           <a:noFill/>
         </p:spPr>
         <p:txBody>
+          <a:bodyPr wrap="none">
+            <a:spAutoFit/>
+          </a:bodyPr>
+          <a:lstStyle/>
+          <a:p>
+            <a:pPr>
+              <a:defRPr sz="1000">
+                <a:solidFill>
+                  <a:srgbClr val="C0504D"/>
+                </a:solidFill>
+                <a:latin typeface="Consolas"/>
+              </a:defRPr>
+            </a:pPr>
+            <a:r>
+              <a:t>FINDING / 作答漂移定律（探索性）</a:t>
+            </a:r>
+          </a:p>
+        </p:txBody>
+      </p:sp>
+      <p:sp>
+        <p:nvSpPr>
+          <p:cNvPr id="3" name="TextBox 2"/>
+          <p:cNvSpPr txBox="1"/>
+          <p:nvPr/>
+        </p:nvSpPr>
+        <p:spPr>
+          <a:xfrm>
+            <a:off x="502920" y="274320"/>
+            <a:ext cx="11155680" cy="822960"/>
+          </a:xfrm>
+          <a:prstGeom prst="rect">
+            <a:avLst/>
+          </a:prstGeom>
+          <a:noFill/>
+        </p:spPr>
+        <p:txBody>
           <a:bodyPr wrap="square">
             <a:spAutoFit/>
           </a:bodyPr>
           <a:lstStyle/>
           <a:p>
             <a:pPr>
-              <a:defRPr sz="3000" b="1">
-                <a:solidFill>
-                  <a:srgbClr val="1F3A5F"/>
+              <a:defRPr sz="2800" b="1">
+                <a:solidFill>
+                  <a:srgbClr val="1D2A3A"/>
                 </a:solidFill>
                 <a:latin typeface="微软雅黑"/>
               </a:defRPr>
             </a:pPr>
             <a:r>
-              <a:t>结果 E3：框架的价值在于否决伪阳性</a:t>
+              <a:t>漂移随温度升、在症状量表上更强、中文更高</a:t>
             </a:r>
           </a:p>
         </p:txBody>
       </p:sp>
       <p:pic>
         <p:nvPicPr>
-          <p:cNvPr id="3" name="Picture 2" descr="fig2_intervention.png"/>
+          <p:cNvPr id="4" name="Picture 3" descr="fig9_drift.png"/>
           <p:cNvPicPr>
             <a:picLocks noChangeAspect="1"/>
           </p:cNvPicPr>
@@ -4301,8 +4772,8 @@
         </p:blipFill>
         <p:spPr>
           <a:xfrm>
-            <a:off x="731520" y="1463040"/>
-            <a:ext cx="7498079" cy="4120566"/>
+            <a:off x="640080" y="1371600"/>
+            <a:ext cx="7498079" cy="2542051"/>
           </a:xfrm>
           <a:prstGeom prst="rect">
             <a:avLst/>
@@ -4311,14 +4782,14 @@
       </p:pic>
       <p:sp>
         <p:nvSpPr>
-          <p:cNvPr id="4" name="TextBox 3"/>
+          <p:cNvPr id="5" name="TextBox 4"/>
           <p:cNvSpPr txBox="1"/>
           <p:nvPr/>
         </p:nvSpPr>
         <p:spPr>
           <a:xfrm>
-            <a:off x="8412480" y="1645920"/>
-            <a:ext cx="3566160" cy="5120640"/>
+            <a:off x="8503920" y="1645920"/>
+            <a:ext cx="3291840" cy="5303520"/>
           </a:xfrm>
           <a:prstGeom prst="rect">
             <a:avLst/>
@@ -4332,32 +4803,28 @@
           <a:lstStyle/>
           <a:p>
             <a:pPr>
-              <a:defRPr sz="1300">
+              <a:defRPr sz="1200">
+                <a:solidFill>
+                  <a:srgbClr val="1D2A3A"/>
+                </a:solidFill>
                 <a:latin typeface="微软雅黑"/>
               </a:defRPr>
             </a:pPr>
             <a:r>
-              <a:t>修复测量污染后重跑：6 轮干预三臂 UCLA 变化均不显著（n=3）</a:t>
-            </a:r>
-          </a:p>
-          <a:p>
-            <a:pPr>
-              <a:defRPr sz="1300">
+              <a:t>症状量表 zh-en：+0.1，p=0.5466</a:t>
+            </a:r>
+          </a:p>
+          <a:p>
+            <a:pPr>
+              <a:defRPr sz="1200">
+                <a:solidFill>
+                  <a:srgbClr val="1D2A3A"/>
+                </a:solidFill>
                 <a:latin typeface="微软雅黑"/>
               </a:defRPr>
             </a:pPr>
             <a:r>
-              <a:t>旧缺陷数据曾现陪伴优于中性（p=0.024），修复后消失</a:t>
-            </a:r>
-          </a:p>
-          <a:p>
-            <a:pPr>
-              <a:defRPr sz="1300">
-                <a:latin typeface="微软雅黑"/>
-              </a:defRPr>
-            </a:pPr>
-            <a:r>
-              <a:t>盲测+对照+重测 = 可复核的疗效证据形式</a:t>
+              <a:t>负结果同样如实报告</a:t>
             </a:r>
           </a:p>
         </p:txBody>
@@ -4388,8 +4855,8 @@
         </p:nvSpPr>
         <p:spPr>
           <a:xfrm>
-            <a:off x="548640" y="320040"/>
-            <a:ext cx="10972800" cy="914400"/>
+            <a:off x="548640" y="201168"/>
+            <a:ext cx="10972800" cy="274320"/>
           </a:xfrm>
           <a:prstGeom prst="rect">
             <a:avLst/>
@@ -4397,59 +4864,35 @@
           <a:noFill/>
         </p:spPr>
         <p:txBody>
-          <a:bodyPr wrap="square">
+          <a:bodyPr wrap="none">
             <a:spAutoFit/>
           </a:bodyPr>
           <a:lstStyle/>
           <a:p>
             <a:pPr>
-              <a:defRPr sz="3000" b="1">
-                <a:solidFill>
-                  <a:srgbClr val="1F3A5F"/>
-                </a:solidFill>
-                <a:latin typeface="微软雅黑"/>
-              </a:defRPr>
-            </a:pPr>
-            <a:r>
-              <a:t>发现：LLM 症状量表系统性高报（作答漂移）</a:t>
-            </a:r>
-          </a:p>
-        </p:txBody>
-      </p:sp>
-      <p:pic>
-        <p:nvPicPr>
-          <p:cNvPr id="3" name="Picture 2" descr="fig3_fidelity.png"/>
-          <p:cNvPicPr>
-            <a:picLocks noChangeAspect="1"/>
-          </p:cNvPicPr>
-          <p:nvPr/>
-        </p:nvPicPr>
-        <p:blipFill>
-          <a:blip r:embed="rId2"/>
-          <a:stretch>
-            <a:fillRect/>
-          </a:stretch>
-        </p:blipFill>
-        <p:spPr>
-          <a:xfrm>
-            <a:off x="731520" y="1463040"/>
-            <a:ext cx="6400800" cy="4765401"/>
-          </a:xfrm>
-          <a:prstGeom prst="rect">
-            <a:avLst/>
-          </a:prstGeom>
-        </p:spPr>
-      </p:pic>
-      <p:sp>
-        <p:nvSpPr>
-          <p:cNvPr id="4" name="TextBox 3"/>
+              <a:defRPr sz="1000">
+                <a:solidFill>
+                  <a:srgbClr val="C0504D"/>
+                </a:solidFill>
+                <a:latin typeface="Consolas"/>
+              </a:defRPr>
+            </a:pPr>
+            <a:r>
+              <a:t>OUTPUT / PsyMirror-Bench 榜单</a:t>
+            </a:r>
+          </a:p>
+        </p:txBody>
+      </p:sp>
+      <p:sp>
+        <p:nvSpPr>
+          <p:cNvPr id="3" name="TextBox 2"/>
           <p:cNvSpPr txBox="1"/>
           <p:nvPr/>
         </p:nvSpPr>
         <p:spPr>
           <a:xfrm>
-            <a:off x="7498079" y="1645920"/>
-            <a:ext cx="4114800" cy="5120640"/>
+            <a:off x="502920" y="274320"/>
+            <a:ext cx="11155680" cy="822960"/>
           </a:xfrm>
           <a:prstGeom prst="rect">
             <a:avLst/>
@@ -4463,22 +4906,77 @@
           <a:lstStyle/>
           <a:p>
             <a:pPr>
-              <a:defRPr sz="1400">
+              <a:defRPr sz="2800" b="1">
+                <a:solidFill>
+                  <a:srgbClr val="1D2A3A"/>
+                </a:solidFill>
                 <a:latin typeface="微软雅黑"/>
               </a:defRPr>
             </a:pPr>
             <a:r>
-              <a:t>方向正确、绝对水平偏高：开朗角色的 GAD-7 实测 15.2（声明 0-4）</a:t>
-            </a:r>
-          </a:p>
-          <a:p>
-            <a:pPr>
-              <a:defRPr sz="1400">
+              <a:t>心理大模型五维评分卡 + 开放数据集</a:t>
+            </a:r>
+          </a:p>
+        </p:txBody>
+      </p:sp>
+      <p:sp>
+        <p:nvSpPr>
+          <p:cNvPr id="4" name="TextBox 3"/>
+          <p:cNvSpPr txBox="1"/>
+          <p:nvPr/>
+        </p:nvSpPr>
+        <p:spPr>
+          <a:xfrm>
+            <a:off x="640080" y="1463040"/>
+            <a:ext cx="10881360" cy="5303520"/>
+          </a:xfrm>
+          <a:prstGeom prst="rect">
+            <a:avLst/>
+          </a:prstGeom>
+          <a:noFill/>
+        </p:spPr>
+        <p:txBody>
+          <a:bodyPr wrap="square">
+            <a:spAutoFit/>
+          </a:bodyPr>
+          <a:lstStyle/>
+          <a:p>
+            <a:pPr>
+              <a:defRPr sz="1600">
+                <a:solidFill>
+                  <a:srgbClr val="1D2A3A"/>
+                </a:solidFill>
                 <a:latin typeface="微软雅黑"/>
               </a:defRPr>
             </a:pPr>
             <a:r>
-              <a:t>与最新文献 LLM 心理画像是测量伪影 的发现一致</a:t>
+              <a:t>信度（重测 ICC）· 效度（已知组+保真度）· 反应度（孪生预演）· 安全性（危机红队）· 文化等价（DIF）</a:t>
+            </a:r>
+          </a:p>
+          <a:p>
+            <a:pPr>
+              <a:defRPr sz="1600">
+                <a:solidFill>
+                  <a:srgbClr val="1D2A3A"/>
+                </a:solidFill>
+                <a:latin typeface="微软雅黑"/>
+              </a:defRPr>
+            </a:pPr>
+            <a:r>
+              <a:t>任何 OpenAI 兼容心理大模型，一条命令入榜；商业模型提供 API key 即可评测。</a:t>
+            </a:r>
+          </a:p>
+          <a:p>
+            <a:pPr>
+              <a:defRPr sz="1600">
+                <a:solidFill>
+                  <a:srgbClr val="1D2A3A"/>
+                </a:solidFill>
+                <a:latin typeface="微软雅黑"/>
+              </a:defRPr>
+            </a:pPr>
+            <a:r>
+              <a:t>全部条目级数据、剧本库、检查表开源，评分代码可复核。</a:t>
             </a:r>
           </a:p>
         </p:txBody>
